--- a/SExxx-Programming for quantum computer/Slide/x. quantum complexity.pptx
+++ b/SExxx-Programming for quantum computer/Slide/x. quantum complexity.pptx
@@ -292,7 +292,7 @@
           <a:p>
             <a:fld id="{E66CAF24-FB94-4574-A55E-47923F811846}" type="datetimeFigureOut">
               <a:rPr lang="vi-VN" smtClean="0"/>
-              <a:t>22/12/25</a:t>
+              <a:t>2/6/26</a:t>
             </a:fld>
             <a:endParaRPr lang="vi-VN"/>
           </a:p>
@@ -967,7 +967,7 @@
           <a:p>
             <a:fld id="{2208C20F-554A-4D96-B4E2-D2CF84C3B608}" type="datetime1">
               <a:rPr lang="vi-VN" smtClean="0"/>
-              <a:t>22/12/25</a:t>
+              <a:t>2/6/26</a:t>
             </a:fld>
             <a:endParaRPr lang="vi-VN"/>
           </a:p>
@@ -1165,7 +1165,7 @@
           <a:p>
             <a:fld id="{6A4D0B5A-882B-4D55-A946-2C17B7ED0364}" type="datetime1">
               <a:rPr lang="vi-VN" smtClean="0"/>
-              <a:t>22/12/25</a:t>
+              <a:t>2/6/26</a:t>
             </a:fld>
             <a:endParaRPr lang="vi-VN"/>
           </a:p>
@@ -1373,7 +1373,7 @@
           <a:p>
             <a:fld id="{0CD32ECF-03C5-4FD7-83C3-211A4374A6E0}" type="datetime1">
               <a:rPr lang="vi-VN" smtClean="0"/>
-              <a:t>22/12/25</a:t>
+              <a:t>2/6/26</a:t>
             </a:fld>
             <a:endParaRPr lang="vi-VN"/>
           </a:p>
@@ -1571,7 +1571,7 @@
           <a:p>
             <a:fld id="{CC1D380E-E649-48DF-A257-75BF96F48B59}" type="datetime1">
               <a:rPr lang="vi-VN" smtClean="0"/>
-              <a:t>22/12/25</a:t>
+              <a:t>2/6/26</a:t>
             </a:fld>
             <a:endParaRPr lang="vi-VN"/>
           </a:p>
@@ -1846,7 +1846,7 @@
           <a:p>
             <a:fld id="{F0D67613-28DF-48E3-B7BE-1E08485F151C}" type="datetime1">
               <a:rPr lang="vi-VN" smtClean="0"/>
-              <a:t>22/12/25</a:t>
+              <a:t>2/6/26</a:t>
             </a:fld>
             <a:endParaRPr lang="vi-VN"/>
           </a:p>
@@ -2111,7 +2111,7 @@
           <a:p>
             <a:fld id="{5FB3284E-9110-4BE1-A370-B994B46C90B9}" type="datetime1">
               <a:rPr lang="vi-VN" smtClean="0"/>
-              <a:t>22/12/25</a:t>
+              <a:t>2/6/26</a:t>
             </a:fld>
             <a:endParaRPr lang="vi-VN"/>
           </a:p>
@@ -2523,7 +2523,7 @@
           <a:p>
             <a:fld id="{6E7C9FEA-240E-4FCB-9D1E-FA8B3DCA4107}" type="datetime1">
               <a:rPr lang="vi-VN" smtClean="0"/>
-              <a:t>22/12/25</a:t>
+              <a:t>2/6/26</a:t>
             </a:fld>
             <a:endParaRPr lang="vi-VN"/>
           </a:p>
@@ -2664,7 +2664,7 @@
           <a:p>
             <a:fld id="{182F377E-49A1-42CE-9EF6-CFF24B12823A}" type="datetime1">
               <a:rPr lang="vi-VN" smtClean="0"/>
-              <a:t>22/12/25</a:t>
+              <a:t>2/6/26</a:t>
             </a:fld>
             <a:endParaRPr lang="vi-VN"/>
           </a:p>
@@ -2777,7 +2777,7 @@
           <a:p>
             <a:fld id="{9F63C755-0E19-4490-A8F9-FB381E54D176}" type="datetime1">
               <a:rPr lang="vi-VN" smtClean="0"/>
-              <a:t>22/12/25</a:t>
+              <a:t>2/6/26</a:t>
             </a:fld>
             <a:endParaRPr lang="vi-VN"/>
           </a:p>
@@ -3088,7 +3088,7 @@
           <a:p>
             <a:fld id="{1DEDA61A-65FB-4656-9924-0B0A0F62022C}" type="datetime1">
               <a:rPr lang="vi-VN" smtClean="0"/>
-              <a:t>22/12/25</a:t>
+              <a:t>2/6/26</a:t>
             </a:fld>
             <a:endParaRPr lang="vi-VN"/>
           </a:p>
@@ -3376,7 +3376,7 @@
           <a:p>
             <a:fld id="{E102CACD-4A31-4457-A5C8-6C5E2262C000}" type="datetime1">
               <a:rPr lang="vi-VN" smtClean="0"/>
-              <a:t>22/12/25</a:t>
+              <a:t>2/6/26</a:t>
             </a:fld>
             <a:endParaRPr lang="vi-VN"/>
           </a:p>
@@ -3617,7 +3617,7 @@
           <a:p>
             <a:fld id="{35ECDA88-E22B-4E1B-86A9-EB4377FEE542}" type="datetime1">
               <a:rPr lang="vi-VN" smtClean="0"/>
-              <a:t>22/12/25</a:t>
+              <a:t>2/6/26</a:t>
             </a:fld>
             <a:endParaRPr lang="vi-VN"/>
           </a:p>
@@ -4053,9 +4053,25 @@
         </p:nvSpPr>
         <p:spPr/>
         <p:txBody>
-          <a:bodyPr/>
+          <a:bodyPr>
+            <a:normAutofit fontScale="90000"/>
+          </a:bodyPr>
           <a:lstStyle/>
           <a:p>
+            <a:r>
+              <a:rPr lang="en-US"/>
+              <a:t>Dynamic system</a:t>
+            </a:r>
+            <a:br>
+              <a:rPr lang="en-US"/>
+            </a:br>
+            <a:r>
+              <a:rPr lang="en-US"/>
+              <a:t>Turing machines</a:t>
+            </a:r>
+            <a:br>
+              <a:rPr lang="en-US"/>
+            </a:br>
             <a:r>
               <a:rPr lang="en-US"/>
               <a:t>Quantum complexity</a:t>
@@ -4087,7 +4103,7 @@
           <a:p>
             <a:r>
               <a:rPr lang="en-US"/>
-              <a:t>25/9/2021</a:t>
+              <a:t>02/06/2026</a:t>
             </a:r>
             <a:endParaRPr lang="vi-VN"/>
           </a:p>
@@ -14660,14 +14676,14 @@
           <a:p>
             <a:r>
               <a:rPr lang="en-US"/>
-              <a:t>1. Classical (Many marbles)</a:t>
+              <a:t>1. Classical dynamic system</a:t>
             </a:r>
             <a:endParaRPr lang="en-US" dirty="0"/>
           </a:p>
         </p:txBody>
       </p:sp>
-      <mc:AlternateContent xmlns:mc="http://schemas.openxmlformats.org/markup-compatibility/2006" xmlns:a14="http://schemas.microsoft.com/office/drawing/2010/main">
-        <mc:Choice Requires="a14">
+      <mc:AlternateContent xmlns:mc="http://schemas.openxmlformats.org/markup-compatibility/2006">
+        <mc:Choice xmlns:a14="http://schemas.microsoft.com/office/drawing/2010/main" Requires="a14">
           <p:sp>
             <p:nvSpPr>
               <p:cNvPr id="5" name="Hộp Văn bản 4">
@@ -14683,7 +14699,7 @@
             <p:spPr>
               <a:xfrm>
                 <a:off x="838198" y="4935469"/>
-                <a:ext cx="6337497" cy="523220"/>
+                <a:ext cx="6337497" cy="560090"/>
               </a:xfrm>
               <a:prstGeom prst="rect">
                 <a:avLst/>
@@ -14702,33 +14718,44 @@
                 </a:r>
                 <a14:m>
                   <m:oMath xmlns:m="http://schemas.openxmlformats.org/officeDocument/2006/math">
-                    <m:sSub>
-                      <m:sSubPr>
+                    <m:sSup>
+                      <m:sSupPr>
                         <m:ctrlPr>
-                          <a:rPr lang="en-US" sz="2800" b="0" i="1" smtClean="0">
+                          <a:rPr lang="vi-VN" sz="2800" b="0" i="1" smtClean="0">
                             <a:latin typeface="Cambria Math" panose="02040503050406030204" pitchFamily="18" charset="0"/>
                           </a:rPr>
                         </m:ctrlPr>
-                      </m:sSubPr>
+                      </m:sSupPr>
                       <m:e>
                         <m:r>
-                          <a:rPr lang="en-US" sz="2800" b="0" i="1" smtClean="0">
+                          <a:rPr lang="vi-VN" sz="2800" b="0" i="1" smtClean="0">
                             <a:latin typeface="Cambria Math" panose="02040503050406030204" pitchFamily="18" charset="0"/>
                           </a:rPr>
                           <m:t>𝑋</m:t>
                         </m:r>
                       </m:e>
-                      <m:sub>
-                        <m:r>
-                          <a:rPr lang="en-US" sz="2800" b="0" i="1" smtClean="0">
-                            <a:latin typeface="Cambria Math" panose="02040503050406030204" pitchFamily="18" charset="0"/>
-                          </a:rPr>
-                          <m:t>𝑡</m:t>
-                        </m:r>
-                      </m:sub>
-                    </m:sSub>
+                      <m:sup>
+                        <m:d>
+                          <m:dPr>
+                            <m:ctrlPr>
+                              <a:rPr lang="vi-VN" sz="2800" b="0" i="1" smtClean="0">
+                                <a:latin typeface="Cambria Math" panose="02040503050406030204" pitchFamily="18" charset="0"/>
+                              </a:rPr>
+                            </m:ctrlPr>
+                          </m:dPr>
+                          <m:e>
+                            <m:r>
+                              <a:rPr lang="vi-VN" sz="2800" i="1">
+                                <a:latin typeface="Cambria Math" panose="02040503050406030204" pitchFamily="18" charset="0"/>
+                              </a:rPr>
+                              <m:t>𝑡</m:t>
+                            </m:r>
+                          </m:e>
+                        </m:d>
+                      </m:sup>
+                    </m:sSup>
                     <m:r>
-                      <a:rPr lang="en-US" sz="2800" b="0" i="1" smtClean="0">
+                      <a:rPr lang="en-US" sz="2800" b="0" i="0" smtClean="0">
                         <a:latin typeface="Cambria Math" panose="02040503050406030204" pitchFamily="18" charset="0"/>
                       </a:rPr>
                       <m:t>=</m:t>
@@ -14736,7 +14763,7 @@
                     <m:sSup>
                       <m:sSupPr>
                         <m:ctrlPr>
-                          <a:rPr lang="en-US" sz="2800" b="0" i="1" smtClean="0">
+                          <a:rPr lang="en-US" sz="2800" b="0" smtClean="0">
                             <a:latin typeface="Cambria Math" panose="02040503050406030204" pitchFamily="18" charset="0"/>
                           </a:rPr>
                         </m:ctrlPr>
@@ -14752,10 +14779,13 @@
                       </m:e>
                       <m:sup>
                         <m:r>
-                          <a:rPr lang="en-US" sz="2800" b="0" i="1" smtClean="0">
+                          <m:rPr>
+                            <m:sty m:val="p"/>
+                          </m:rPr>
+                          <a:rPr lang="en-US" sz="2800" b="0" i="0" smtClean="0">
                             <a:latin typeface="Cambria Math" panose="02040503050406030204" pitchFamily="18" charset="0"/>
                           </a:rPr>
-                          <m:t>𝑇</m:t>
+                          <m:t>T</m:t>
                         </m:r>
                       </m:sup>
                     </m:sSup>
@@ -14766,7 +14796,7 @@
             </p:txBody>
           </p:sp>
         </mc:Choice>
-        <mc:Fallback xmlns="">
+        <mc:Fallback>
           <p:sp>
             <p:nvSpPr>
               <p:cNvPr id="5" name="Hộp Văn bản 4">
@@ -14784,7 +14814,7 @@
             <p:spPr>
               <a:xfrm>
                 <a:off x="838198" y="4935469"/>
-                <a:ext cx="6337497" cy="523220"/>
+                <a:ext cx="6337497" cy="560090"/>
               </a:xfrm>
               <a:prstGeom prst="rect">
                 <a:avLst/>
@@ -14792,7 +14822,7 @@
               <a:blipFill>
                 <a:blip r:embed="rId3"/>
                 <a:stretch>
-                  <a:fillRect l="-1923" t="-11765" b="-34118"/>
+                  <a:fillRect l="-1800" t="-4444" b="-28889"/>
                 </a:stretch>
               </a:blipFill>
             </p:spPr>
@@ -14801,7 +14831,7 @@
               <a:lstStyle/>
               <a:p>
                 <a:r>
-                  <a:rPr lang="en-US">
+                  <a:rPr lang="en-VN">
                     <a:noFill/>
                   </a:rPr>
                   <a:t> </a:t>
@@ -15718,8 +15748,8 @@
           </p:sp>
         </mc:Fallback>
       </mc:AlternateContent>
-      <mc:AlternateContent xmlns:mc="http://schemas.openxmlformats.org/markup-compatibility/2006" xmlns:a14="http://schemas.microsoft.com/office/drawing/2010/main">
-        <mc:Choice Requires="a14">
+      <mc:AlternateContent xmlns:mc="http://schemas.openxmlformats.org/markup-compatibility/2006">
+        <mc:Choice xmlns:a14="http://schemas.microsoft.com/office/drawing/2010/main" Requires="a14">
           <p:sp>
             <p:nvSpPr>
               <p:cNvPr id="10" name="Hộp Văn bản 9">
@@ -15735,7 +15765,7 @@
             <p:spPr>
               <a:xfrm>
                 <a:off x="838198" y="5689411"/>
-                <a:ext cx="6337497" cy="523220"/>
+                <a:ext cx="6337497" cy="560090"/>
               </a:xfrm>
               <a:prstGeom prst="rect">
                 <a:avLst/>
@@ -15754,43 +15784,48 @@
                 </a:r>
                 <a14:m>
                   <m:oMath xmlns:m="http://schemas.openxmlformats.org/officeDocument/2006/math">
-                    <m:sSub>
-                      <m:sSubPr>
+                    <m:sSup>
+                      <m:sSupPr>
                         <m:ctrlPr>
-                          <a:rPr lang="en-US" sz="2800" b="0" i="1" smtClean="0">
+                          <a:rPr lang="vi-VN" sz="2800" b="0" i="1">
                             <a:latin typeface="Cambria Math" panose="02040503050406030204" pitchFamily="18" charset="0"/>
                           </a:rPr>
                         </m:ctrlPr>
-                      </m:sSubPr>
+                      </m:sSupPr>
                       <m:e>
                         <m:r>
-                          <m:rPr>
-                            <m:sty m:val="p"/>
-                          </m:rPr>
-                          <a:rPr lang="en-US" sz="2800" b="0" i="0" smtClean="0">
+                          <a:rPr lang="en-US" sz="2800" b="0" i="1">
                             <a:latin typeface="Cambria Math" panose="02040503050406030204" pitchFamily="18" charset="0"/>
                           </a:rPr>
-                          <m:t>X</m:t>
+                          <m:t>𝑋</m:t>
                         </m:r>
                       </m:e>
-                      <m:sub>
-                        <m:r>
-                          <m:rPr>
-                            <m:sty m:val="p"/>
-                          </m:rPr>
-                          <a:rPr lang="en-US" sz="2800" b="0" i="0" smtClean="0">
-                            <a:latin typeface="Cambria Math" panose="02040503050406030204" pitchFamily="18" charset="0"/>
-                          </a:rPr>
-                          <m:t>t</m:t>
-                        </m:r>
-                        <m:r>
-                          <a:rPr lang="en-US" sz="2800" b="0" i="0" smtClean="0">
-                            <a:latin typeface="Cambria Math" panose="02040503050406030204" pitchFamily="18" charset="0"/>
-                          </a:rPr>
-                          <m:t>+1</m:t>
-                        </m:r>
-                      </m:sub>
-                    </m:sSub>
+                      <m:sup>
+                        <m:d>
+                          <m:dPr>
+                            <m:ctrlPr>
+                              <a:rPr lang="vi-VN" sz="2800" b="0" i="1">
+                                <a:latin typeface="Cambria Math" panose="02040503050406030204" pitchFamily="18" charset="0"/>
+                              </a:rPr>
+                            </m:ctrlPr>
+                          </m:dPr>
+                          <m:e>
+                            <m:r>
+                              <a:rPr lang="vi-VN" sz="2800" i="1">
+                                <a:latin typeface="Cambria Math" panose="02040503050406030204" pitchFamily="18" charset="0"/>
+                              </a:rPr>
+                              <m:t>𝑡</m:t>
+                            </m:r>
+                            <m:r>
+                              <a:rPr lang="vi-VN" sz="2800" b="0" i="1">
+                                <a:latin typeface="Cambria Math" panose="02040503050406030204" pitchFamily="18" charset="0"/>
+                              </a:rPr>
+                              <m:t>+1</m:t>
+                            </m:r>
+                          </m:e>
+                        </m:d>
+                      </m:sup>
+                    </m:sSup>
                     <m:r>
                       <a:rPr lang="en-US" sz="2800" b="0" i="1" smtClean="0">
                         <a:latin typeface="Cambria Math" panose="02040503050406030204" pitchFamily="18" charset="0"/>
@@ -15812,31 +15847,42 @@
                           </a:rPr>
                           <m:t>𝑀</m:t>
                         </m:r>
-                        <m:sSub>
-                          <m:sSubPr>
+                        <m:sSup>
+                          <m:sSupPr>
                             <m:ctrlPr>
-                              <a:rPr lang="en-US" sz="2800" b="0" i="1" smtClean="0">
+                              <a:rPr lang="vi-VN" sz="2800" i="1">
                                 <a:latin typeface="Cambria Math" panose="02040503050406030204" pitchFamily="18" charset="0"/>
                               </a:rPr>
                             </m:ctrlPr>
-                          </m:sSubPr>
+                          </m:sSupPr>
                           <m:e>
                             <m:r>
-                              <a:rPr lang="en-US" sz="2800" b="0" i="1" smtClean="0">
+                              <a:rPr lang="vi-VN" sz="2800" i="1">
                                 <a:latin typeface="Cambria Math" panose="02040503050406030204" pitchFamily="18" charset="0"/>
                               </a:rPr>
                               <m:t>𝑋</m:t>
                             </m:r>
                           </m:e>
-                          <m:sub>
-                            <m:r>
-                              <a:rPr lang="en-US" sz="2800" b="0" i="1" smtClean="0">
-                                <a:latin typeface="Cambria Math" panose="02040503050406030204" pitchFamily="18" charset="0"/>
-                              </a:rPr>
-                              <m:t>𝑡</m:t>
-                            </m:r>
-                          </m:sub>
-                        </m:sSub>
+                          <m:sup>
+                            <m:d>
+                              <m:dPr>
+                                <m:ctrlPr>
+                                  <a:rPr lang="vi-VN" sz="2800" i="1">
+                                    <a:latin typeface="Cambria Math" panose="02040503050406030204" pitchFamily="18" charset="0"/>
+                                  </a:rPr>
+                                </m:ctrlPr>
+                              </m:dPr>
+                              <m:e>
+                                <m:r>
+                                  <a:rPr lang="vi-VN" sz="2800" i="1">
+                                    <a:latin typeface="Cambria Math" panose="02040503050406030204" pitchFamily="18" charset="0"/>
+                                  </a:rPr>
+                                  <m:t>𝑡</m:t>
+                                </m:r>
+                              </m:e>
+                            </m:d>
+                          </m:sup>
+                        </m:sSup>
                         <m:r>
                           <m:rPr>
                             <m:nor/>
@@ -15844,7 +15890,7 @@
                           <a:rPr lang="en-US" sz="2800" b="0" i="0" smtClean="0">
                             <a:latin typeface="Cambria Math" panose="02040503050406030204" pitchFamily="18" charset="0"/>
                           </a:rPr>
-                          <m:t> = </m:t>
+                          <m:t>= </m:t>
                         </m:r>
                         <m:r>
                           <m:rPr>
@@ -15926,7 +15972,7 @@
             </p:txBody>
           </p:sp>
         </mc:Choice>
-        <mc:Fallback xmlns="">
+        <mc:Fallback>
           <p:sp>
             <p:nvSpPr>
               <p:cNvPr id="10" name="Hộp Văn bản 9">
@@ -15944,7 +15990,7 @@
             <p:spPr>
               <a:xfrm>
                 <a:off x="838198" y="5689411"/>
-                <a:ext cx="6337497" cy="523220"/>
+                <a:ext cx="6337497" cy="560090"/>
               </a:xfrm>
               <a:prstGeom prst="rect">
                 <a:avLst/>
@@ -15952,7 +15998,7 @@
               <a:blipFill>
                 <a:blip r:embed="rId5"/>
                 <a:stretch>
-                  <a:fillRect l="-1923" t="-10465" b="-32558"/>
+                  <a:fillRect l="-1800" t="-4348" b="-26087"/>
                 </a:stretch>
               </a:blipFill>
             </p:spPr>
@@ -15961,7 +16007,7 @@
               <a:lstStyle/>
               <a:p>
                 <a:r>
-                  <a:rPr lang="en-US">
+                  <a:rPr lang="en-VN">
                     <a:noFill/>
                   </a:rPr>
                   <a:t> </a:t>
@@ -28043,6 +28089,82 @@
           </a:fontRef>
         </p:style>
       </p:cxnSp>
+      <p:sp>
+        <p:nvSpPr>
+          <p:cNvPr id="7" name="Hộp Văn bản 23">
+            <a:extLst>
+              <a:ext uri="{FF2B5EF4-FFF2-40B4-BE49-F238E27FC236}">
+                <a16:creationId xmlns:a16="http://schemas.microsoft.com/office/drawing/2014/main" id="{DAA8A532-FCEE-9978-E23F-E58D4E3E9AE0}"/>
+              </a:ext>
+            </a:extLst>
+          </p:cNvPr>
+          <p:cNvSpPr txBox="1"/>
+          <p:nvPr/>
+        </p:nvSpPr>
+        <p:spPr>
+          <a:xfrm>
+            <a:off x="8660297" y="1057732"/>
+            <a:ext cx="260679" cy="593139"/>
+          </a:xfrm>
+          <a:prstGeom prst="rect">
+            <a:avLst/>
+          </a:prstGeom>
+          <a:noFill/>
+          <a:ln>
+            <a:solidFill>
+              <a:srgbClr val="FF0000"/>
+            </a:solidFill>
+          </a:ln>
+        </p:spPr>
+        <p:txBody>
+          <a:bodyPr wrap="square" rtlCol="0">
+            <a:spAutoFit/>
+          </a:bodyPr>
+          <a:lstStyle/>
+          <a:p>
+            <a:endParaRPr lang="vi-VN"/>
+          </a:p>
+        </p:txBody>
+      </p:sp>
+      <p:sp>
+        <p:nvSpPr>
+          <p:cNvPr id="10" name="TextBox 9">
+            <a:extLst>
+              <a:ext uri="{FF2B5EF4-FFF2-40B4-BE49-F238E27FC236}">
+                <a16:creationId xmlns:a16="http://schemas.microsoft.com/office/drawing/2014/main" id="{D0F20B7E-A7B9-8825-4CF9-58B7365860A7}"/>
+              </a:ext>
+            </a:extLst>
+          </p:cNvPr>
+          <p:cNvSpPr txBox="1"/>
+          <p:nvPr/>
+        </p:nvSpPr>
+        <p:spPr>
+          <a:xfrm>
+            <a:off x="9054790" y="1126435"/>
+            <a:ext cx="1642162" cy="369332"/>
+          </a:xfrm>
+          <a:prstGeom prst="rect">
+            <a:avLst/>
+          </a:prstGeom>
+          <a:noFill/>
+        </p:spPr>
+        <p:txBody>
+          <a:bodyPr wrap="square" rtlCol="0">
+            <a:spAutoFit/>
+          </a:bodyPr>
+          <a:lstStyle/>
+          <a:p>
+            <a:r>
+              <a:rPr lang="en-VN">
+                <a:solidFill>
+                  <a:srgbClr val="FF0000"/>
+                </a:solidFill>
+              </a:rPr>
+              <a:t>Tính hội tụ!</a:t>
+            </a:r>
+          </a:p>
+        </p:txBody>
+      </p:sp>
     </p:spTree>
     <p:extLst>
       <p:ext uri="{BB962C8B-B14F-4D97-AF65-F5344CB8AC3E}">
@@ -28096,14 +28218,14 @@
           <a:p>
             <a:r>
               <a:rPr lang="en-US"/>
-              <a:t>1. Classical</a:t>
+              <a:t>1. Classical dynamic system</a:t>
             </a:r>
             <a:endParaRPr lang="en-US" dirty="0"/>
           </a:p>
         </p:txBody>
       </p:sp>
-      <mc:AlternateContent xmlns:mc="http://schemas.openxmlformats.org/markup-compatibility/2006" xmlns:a14="http://schemas.microsoft.com/office/drawing/2010/main">
-        <mc:Choice Requires="a14">
+      <mc:AlternateContent xmlns:mc="http://schemas.openxmlformats.org/markup-compatibility/2006">
+        <mc:Choice xmlns:a14="http://schemas.microsoft.com/office/drawing/2010/main" Requires="a14">
           <p:sp>
             <p:nvSpPr>
               <p:cNvPr id="8" name="Hộp Văn bản 7">
@@ -28119,7 +28241,7 @@
             <p:spPr>
               <a:xfrm>
                 <a:off x="838200" y="1825625"/>
-                <a:ext cx="10041835" cy="2764668"/>
+                <a:ext cx="10041835" cy="2782365"/>
               </a:xfrm>
               <a:prstGeom prst="rect">
                 <a:avLst/>
@@ -28160,19 +28282,7 @@
                       <a:rPr lang="en-US" sz="2800" b="0" i="1" smtClean="0">
                         <a:latin typeface="Cambria Math" panose="02040503050406030204" pitchFamily="18" charset="0"/>
                       </a:rPr>
-                      <m:t> </m:t>
-                    </m:r>
-                    <m:r>
-                      <a:rPr lang="en-US" sz="2800" b="0" i="1" smtClean="0">
-                        <a:latin typeface="Cambria Math" panose="02040503050406030204" pitchFamily="18" charset="0"/>
-                      </a:rPr>
-                      <m:t>𝑥</m:t>
-                    </m:r>
-                    <m:r>
-                      <a:rPr lang="en-US" sz="2800" b="0" i="1" smtClean="0">
-                        <a:latin typeface="Cambria Math" panose="02040503050406030204" pitchFamily="18" charset="0"/>
-                      </a:rPr>
-                      <m:t> </m:t>
+                      <m:t> × </m:t>
                     </m:r>
                     <m:r>
                       <a:rPr lang="en-US" sz="2800" b="0" i="1" smtClean="0">
@@ -28304,24 +28414,30 @@
                       </m:sSupPr>
                       <m:e>
                         <m:r>
-                          <m:rPr>
-                            <m:sty m:val="p"/>
-                          </m:rPr>
-                          <a:rPr lang="en-US" sz="2800" b="0" i="0" smtClean="0">
+                          <a:rPr lang="en-US" sz="2800" b="0" i="1" smtClean="0">
                             <a:latin typeface="Cambria Math" panose="02040503050406030204" pitchFamily="18" charset="0"/>
                           </a:rPr>
-                          <m:t>M</m:t>
+                          <m:t>𝑀</m:t>
                         </m:r>
                       </m:e>
                       <m:sup>
                         <m:r>
-                          <m:rPr>
-                            <m:sty m:val="p"/>
-                          </m:rPr>
-                          <a:rPr lang="en-US" sz="2800" b="0" i="0" smtClean="0">
+                          <a:rPr lang="vi-VN" sz="2800" b="0" i="1" smtClean="0">
                             <a:latin typeface="Cambria Math" panose="02040503050406030204" pitchFamily="18" charset="0"/>
                           </a:rPr>
-                          <m:t>k</m:t>
+                          <m:t>(</m:t>
+                        </m:r>
+                        <m:r>
+                          <a:rPr lang="en-US" sz="2800" b="0" i="1" smtClean="0">
+                            <a:latin typeface="Cambria Math" panose="02040503050406030204" pitchFamily="18" charset="0"/>
+                          </a:rPr>
+                          <m:t>𝑘</m:t>
+                        </m:r>
+                        <m:r>
+                          <a:rPr lang="vi-VN" sz="2800" b="0" i="1" smtClean="0">
+                            <a:latin typeface="Cambria Math" panose="02040503050406030204" pitchFamily="18" charset="0"/>
+                          </a:rPr>
+                          <m:t>)</m:t>
                         </m:r>
                       </m:sup>
                     </m:sSup>
@@ -28349,43 +28465,54 @@
                         </a:rPr>
                         <m:t>⇒</m:t>
                       </m:r>
-                      <m:sSub>
-                        <m:sSubPr>
+                      <m:sSup>
+                        <m:sSupPr>
                           <m:ctrlPr>
-                            <a:rPr lang="en-US" sz="2800" b="0" i="1" smtClean="0">
+                            <a:rPr lang="vi-VN" sz="2800" b="0" i="1">
                               <a:latin typeface="Cambria Math" panose="02040503050406030204" pitchFamily="18" charset="0"/>
                             </a:rPr>
                           </m:ctrlPr>
-                        </m:sSubPr>
+                        </m:sSupPr>
                         <m:e>
                           <m:r>
-                            <a:rPr lang="en-US" sz="2800" b="0" i="1" smtClean="0">
+                            <a:rPr lang="en-US" sz="2800" i="1">
                               <a:latin typeface="Cambria Math" panose="02040503050406030204" pitchFamily="18" charset="0"/>
                             </a:rPr>
                             <m:t>𝑋</m:t>
                           </m:r>
                         </m:e>
-                        <m:sub>
-                          <m:r>
-                            <a:rPr lang="en-US" sz="2800" b="0" i="1" smtClean="0">
-                              <a:latin typeface="Cambria Math" panose="02040503050406030204" pitchFamily="18" charset="0"/>
-                            </a:rPr>
-                            <m:t>𝑡</m:t>
-                          </m:r>
-                          <m:r>
-                            <a:rPr lang="en-US" sz="2800" b="0" i="1" smtClean="0">
-                              <a:latin typeface="Cambria Math" panose="02040503050406030204" pitchFamily="18" charset="0"/>
-                            </a:rPr>
-                            <m:t>+</m:t>
-                          </m:r>
-                          <m:r>
-                            <a:rPr lang="en-US" sz="2800" b="0" i="1" smtClean="0">
-                              <a:latin typeface="Cambria Math" panose="02040503050406030204" pitchFamily="18" charset="0"/>
-                            </a:rPr>
-                            <m:t>𝑘</m:t>
-                          </m:r>
-                        </m:sub>
-                      </m:sSub>
+                        <m:sup>
+                          <m:d>
+                            <m:dPr>
+                              <m:ctrlPr>
+                                <a:rPr lang="vi-VN" sz="2800" b="0" i="1">
+                                  <a:latin typeface="Cambria Math" panose="02040503050406030204" pitchFamily="18" charset="0"/>
+                                </a:rPr>
+                              </m:ctrlPr>
+                            </m:dPr>
+                            <m:e>
+                              <m:r>
+                                <a:rPr lang="en-US" sz="2800" i="1">
+                                  <a:latin typeface="Cambria Math" panose="02040503050406030204" pitchFamily="18" charset="0"/>
+                                </a:rPr>
+                                <m:t>𝑡</m:t>
+                              </m:r>
+                              <m:r>
+                                <a:rPr lang="en-US" sz="2800" i="1">
+                                  <a:latin typeface="Cambria Math" panose="02040503050406030204" pitchFamily="18" charset="0"/>
+                                </a:rPr>
+                                <m:t>+</m:t>
+                              </m:r>
+                              <m:r>
+                                <a:rPr lang="en-US" sz="2800" i="1">
+                                  <a:latin typeface="Cambria Math" panose="02040503050406030204" pitchFamily="18" charset="0"/>
+                                </a:rPr>
+                                <m:t>𝑘</m:t>
+                              </m:r>
+                            </m:e>
+                          </m:d>
+                        </m:sup>
+                      </m:sSup>
                       <m:r>
                         <a:rPr lang="en-US" sz="2800" b="0" i="1" smtClean="0">
                           <a:latin typeface="Cambria Math" panose="02040503050406030204" pitchFamily="18" charset="0"/>
@@ -28410,47 +28537,70 @@
                         </m:e>
                         <m:sup>
                           <m:r>
+                            <a:rPr lang="vi-VN" sz="2800" b="0" i="1" smtClean="0">
+                              <a:latin typeface="Cambria Math" panose="02040503050406030204" pitchFamily="18" charset="0"/>
+                            </a:rPr>
+                            <m:t>(</m:t>
+                          </m:r>
+                          <m:r>
                             <a:rPr lang="en-US" sz="2800" b="0" i="1" smtClean="0">
                               <a:latin typeface="Cambria Math" panose="02040503050406030204" pitchFamily="18" charset="0"/>
                             </a:rPr>
                             <m:t>𝑘</m:t>
                           </m:r>
+                          <m:r>
+                            <a:rPr lang="vi-VN" sz="2800" b="0" i="1" smtClean="0">
+                              <a:latin typeface="Cambria Math" panose="02040503050406030204" pitchFamily="18" charset="0"/>
+                            </a:rPr>
+                            <m:t>)</m:t>
+                          </m:r>
                         </m:sup>
                       </m:sSup>
-                      <m:sSub>
-                        <m:sSubPr>
+                      <m:sSup>
+                        <m:sSupPr>
                           <m:ctrlPr>
-                            <a:rPr lang="en-US" sz="2800" b="0" i="1" smtClean="0">
+                            <a:rPr lang="vi-VN" sz="2800" b="0" i="1">
                               <a:latin typeface="Cambria Math" panose="02040503050406030204" pitchFamily="18" charset="0"/>
                             </a:rPr>
                           </m:ctrlPr>
-                        </m:sSubPr>
+                        </m:sSupPr>
                         <m:e>
                           <m:r>
-                            <a:rPr lang="en-US" sz="2800" b="0" i="1" smtClean="0">
+                            <a:rPr lang="en-VN" sz="2800" i="1">
                               <a:latin typeface="Cambria Math" panose="02040503050406030204" pitchFamily="18" charset="0"/>
                             </a:rPr>
                             <m:t>𝑋</m:t>
                           </m:r>
                         </m:e>
-                        <m:sub>
-                          <m:r>
-                            <a:rPr lang="en-US" sz="2800" b="0" i="1" smtClean="0">
-                              <a:latin typeface="Cambria Math" panose="02040503050406030204" pitchFamily="18" charset="0"/>
-                            </a:rPr>
-                            <m:t>𝑡</m:t>
-                          </m:r>
-                        </m:sub>
-                      </m:sSub>
+                        <m:sup>
+                          <m:d>
+                            <m:dPr>
+                              <m:ctrlPr>
+                                <a:rPr lang="vi-VN" sz="2800" b="0" i="1">
+                                  <a:latin typeface="Cambria Math" panose="02040503050406030204" pitchFamily="18" charset="0"/>
+                                </a:rPr>
+                              </m:ctrlPr>
+                            </m:dPr>
+                            <m:e>
+                              <m:r>
+                                <a:rPr lang="vi-VN" sz="2800" i="1">
+                                  <a:latin typeface="Cambria Math" panose="02040503050406030204" pitchFamily="18" charset="0"/>
+                                </a:rPr>
+                                <m:t>𝑡</m:t>
+                              </m:r>
+                            </m:e>
+                          </m:d>
+                        </m:sup>
+                      </m:sSup>
                     </m:oMath>
                   </m:oMathPara>
                 </a14:m>
-                <a:endParaRPr lang="en-US" sz="2800"/>
+                <a:endParaRPr lang="en-US" sz="2800" i="1"/>
               </a:p>
             </p:txBody>
           </p:sp>
         </mc:Choice>
-        <mc:Fallback xmlns="">
+        <mc:Fallback>
           <p:sp>
             <p:nvSpPr>
               <p:cNvPr id="8" name="Hộp Văn bản 7">
@@ -28468,7 +28618,7 @@
             <p:spPr>
               <a:xfrm>
                 <a:off x="838200" y="1825625"/>
-                <a:ext cx="10041835" cy="2764668"/>
+                <a:ext cx="10041835" cy="2782365"/>
               </a:xfrm>
               <a:prstGeom prst="rect">
                 <a:avLst/>
@@ -28476,7 +28626,7 @@
               <a:blipFill>
                 <a:blip r:embed="rId2"/>
                 <a:stretch>
-                  <a:fillRect l="-1275" t="-1982"/>
+                  <a:fillRect l="-5436" t="-2273" b="-3182"/>
                 </a:stretch>
               </a:blipFill>
             </p:spPr>
@@ -28485,7 +28635,7 @@
               <a:lstStyle/>
               <a:p>
                 <a:r>
-                  <a:rPr lang="vi-VN">
+                  <a:rPr lang="en-VN">
                     <a:noFill/>
                   </a:rPr>
                   <a:t> </a:t>
@@ -29063,7 +29213,15 @@
             </a:r>
             <a:r>
               <a:rPr lang="en-US"/>
-              <a:t>olynomial time with false negative only</a:t>
+              <a:t>olynomial time with </a:t>
+            </a:r>
+            <a:r>
+              <a:rPr lang="en-US" b="1"/>
+              <a:t>false negative </a:t>
+            </a:r>
+            <a:r>
+              <a:rPr lang="en-US"/>
+              <a:t>only</a:t>
             </a:r>
           </a:p>
         </p:txBody>
@@ -29114,7 +29272,15 @@
             </a:r>
             <a:r>
               <a:rPr lang="en-US"/>
-              <a:t>olynomial time with false positive only</a:t>
+              <a:t>olynomial time with </a:t>
+            </a:r>
+            <a:r>
+              <a:rPr lang="en-US" b="1"/>
+              <a:t>false positive </a:t>
+            </a:r>
+            <a:r>
+              <a:rPr lang="en-US"/>
+              <a:t>only</a:t>
             </a:r>
           </a:p>
         </p:txBody>
@@ -29169,7 +29335,7 @@
             </a:r>
             <a:r>
               <a:rPr lang="en-US"/>
-              <a:t>ero error</a:t>
+              <a:t>ero error, allow ? result</a:t>
             </a:r>
           </a:p>
         </p:txBody>
@@ -36579,7 +36745,7 @@
         </p:nvSpPr>
         <p:spPr>
           <a:xfrm>
-            <a:off x="3949148" y="5194752"/>
+            <a:off x="4450953" y="5259236"/>
             <a:ext cx="1762539" cy="923330"/>
           </a:xfrm>
           <a:prstGeom prst="rect">
@@ -36595,7 +36761,85 @@
           <a:p>
             <a:r>
               <a:rPr lang="en-US"/>
-              <a:t>QP-algorithm for solving Simon’s problem</a:t>
+              <a:t>Deutsch-Jozsa,</a:t>
+            </a:r>
+          </a:p>
+          <a:p>
+            <a:r>
+              <a:rPr lang="en-US"/>
+              <a:t>Require only 1 query</a:t>
+            </a:r>
+            <a:endParaRPr lang="vi-VN"/>
+          </a:p>
+        </p:txBody>
+      </p:sp>
+      <p:sp>
+        <p:nvSpPr>
+          <p:cNvPr id="5" name="Hộp Văn bản 2">
+            <a:extLst>
+              <a:ext uri="{FF2B5EF4-FFF2-40B4-BE49-F238E27FC236}">
+                <a16:creationId xmlns:a16="http://schemas.microsoft.com/office/drawing/2014/main" id="{19A29E29-5C8D-352F-CDD9-89F78ED1C0CD}"/>
+              </a:ext>
+            </a:extLst>
+          </p:cNvPr>
+          <p:cNvSpPr txBox="1"/>
+          <p:nvPr/>
+        </p:nvSpPr>
+        <p:spPr>
+          <a:xfrm>
+            <a:off x="4450952" y="904095"/>
+            <a:ext cx="1762539" cy="369332"/>
+          </a:xfrm>
+          <a:prstGeom prst="rect">
+            <a:avLst/>
+          </a:prstGeom>
+          <a:noFill/>
+        </p:spPr>
+        <p:txBody>
+          <a:bodyPr wrap="square" rtlCol="0">
+            <a:spAutoFit/>
+          </a:bodyPr>
+          <a:lstStyle/>
+          <a:p>
+            <a:r>
+              <a:rPr lang="en-US"/>
+              <a:t>Simon, Grover</a:t>
+            </a:r>
+            <a:endParaRPr lang="vi-VN"/>
+          </a:p>
+        </p:txBody>
+      </p:sp>
+      <p:sp>
+        <p:nvSpPr>
+          <p:cNvPr id="7" name="Hộp Văn bản 2">
+            <a:extLst>
+              <a:ext uri="{FF2B5EF4-FFF2-40B4-BE49-F238E27FC236}">
+                <a16:creationId xmlns:a16="http://schemas.microsoft.com/office/drawing/2014/main" id="{5D1A2BBF-B1B7-7796-342E-BDA93F5D5B43}"/>
+              </a:ext>
+            </a:extLst>
+          </p:cNvPr>
+          <p:cNvSpPr txBox="1"/>
+          <p:nvPr/>
+        </p:nvSpPr>
+        <p:spPr>
+          <a:xfrm>
+            <a:off x="4450951" y="3105630"/>
+            <a:ext cx="1762539" cy="369332"/>
+          </a:xfrm>
+          <a:prstGeom prst="rect">
+            <a:avLst/>
+          </a:prstGeom>
+          <a:noFill/>
+        </p:spPr>
+        <p:txBody>
+          <a:bodyPr wrap="square" rtlCol="0">
+            <a:spAutoFit/>
+          </a:bodyPr>
+          <a:lstStyle/>
+          <a:p>
+            <a:r>
+              <a:rPr lang="en-US"/>
+              <a:t>Same as ZPP</a:t>
             </a:r>
             <a:endParaRPr lang="vi-VN"/>
           </a:p>
@@ -38160,14 +38404,14 @@
           <a:p>
             <a:r>
               <a:rPr lang="en-US"/>
-              <a:t>2. Dynamic / Markov (Single marble)</a:t>
+              <a:t>2. Single marble</a:t>
             </a:r>
             <a:endParaRPr lang="en-US" dirty="0"/>
           </a:p>
         </p:txBody>
       </p:sp>
-      <mc:AlternateContent xmlns:mc="http://schemas.openxmlformats.org/markup-compatibility/2006" xmlns:a14="http://schemas.microsoft.com/office/drawing/2010/main">
-        <mc:Choice Requires="a14">
+      <mc:AlternateContent xmlns:mc="http://schemas.openxmlformats.org/markup-compatibility/2006">
+        <mc:Choice xmlns:a14="http://schemas.microsoft.com/office/drawing/2010/main" Requires="a14">
           <p:sp>
             <p:nvSpPr>
               <p:cNvPr id="5" name="Hộp Văn bản 4">
@@ -38182,8 +38426,8 @@
             </p:nvSpPr>
             <p:spPr>
               <a:xfrm>
-                <a:off x="5854503" y="5215713"/>
-                <a:ext cx="6337497" cy="523220"/>
+                <a:off x="5622235" y="5215713"/>
+                <a:ext cx="6569765" cy="552267"/>
               </a:xfrm>
               <a:prstGeom prst="rect">
                 <a:avLst/>
@@ -38202,31 +38446,42 @@
                 </a:r>
                 <a14:m>
                   <m:oMath xmlns:m="http://schemas.openxmlformats.org/officeDocument/2006/math">
-                    <m:sSub>
-                      <m:sSubPr>
+                    <m:sSup>
+                      <m:sSupPr>
                         <m:ctrlPr>
-                          <a:rPr lang="en-US" sz="2800" b="0" i="1" smtClean="0">
+                          <a:rPr lang="vi-VN" sz="2800" i="1">
                             <a:latin typeface="Cambria Math" panose="02040503050406030204" pitchFamily="18" charset="0"/>
                           </a:rPr>
                         </m:ctrlPr>
-                      </m:sSubPr>
+                      </m:sSupPr>
                       <m:e>
                         <m:r>
-                          <a:rPr lang="en-US" sz="2800" b="0" i="1" smtClean="0">
+                          <a:rPr lang="vi-VN" sz="2800" i="1">
                             <a:latin typeface="Cambria Math" panose="02040503050406030204" pitchFamily="18" charset="0"/>
                           </a:rPr>
                           <m:t>𝑋</m:t>
                         </m:r>
                       </m:e>
-                      <m:sub>
-                        <m:r>
-                          <a:rPr lang="en-US" sz="2800" b="0" i="1" smtClean="0">
-                            <a:latin typeface="Cambria Math" panose="02040503050406030204" pitchFamily="18" charset="0"/>
-                          </a:rPr>
-                          <m:t>𝑡</m:t>
-                        </m:r>
-                      </m:sub>
-                    </m:sSub>
+                      <m:sup>
+                        <m:d>
+                          <m:dPr>
+                            <m:ctrlPr>
+                              <a:rPr lang="vi-VN" sz="2800" i="1">
+                                <a:latin typeface="Cambria Math" panose="02040503050406030204" pitchFamily="18" charset="0"/>
+                              </a:rPr>
+                            </m:ctrlPr>
+                          </m:dPr>
+                          <m:e>
+                            <m:r>
+                              <a:rPr lang="vi-VN" sz="2800" i="1">
+                                <a:latin typeface="Cambria Math" panose="02040503050406030204" pitchFamily="18" charset="0"/>
+                              </a:rPr>
+                              <m:t>𝑡</m:t>
+                            </m:r>
+                          </m:e>
+                        </m:d>
+                      </m:sup>
+                    </m:sSup>
                     <m:r>
                       <a:rPr lang="en-US" sz="2800" b="0" i="1" smtClean="0">
                         <a:latin typeface="Cambria Math" panose="02040503050406030204" pitchFamily="18" charset="0"/>
@@ -38280,7 +38535,7 @@
             </p:txBody>
           </p:sp>
         </mc:Choice>
-        <mc:Fallback xmlns="">
+        <mc:Fallback>
           <p:sp>
             <p:nvSpPr>
               <p:cNvPr id="5" name="Hộp Văn bản 4">
@@ -38297,8 +38552,8 @@
             </p:nvSpPr>
             <p:spPr>
               <a:xfrm>
-                <a:off x="5854503" y="5215713"/>
-                <a:ext cx="6337497" cy="523220"/>
+                <a:off x="5622235" y="5215713"/>
+                <a:ext cx="6569765" cy="552267"/>
               </a:xfrm>
               <a:prstGeom prst="rect">
                 <a:avLst/>
@@ -38306,7 +38561,7 @@
               <a:blipFill>
                 <a:blip r:embed="rId3"/>
                 <a:stretch>
-                  <a:fillRect l="-1923" t="-11765" b="-34118"/>
+                  <a:fillRect l="-1927" t="-4444" b="-28889"/>
                 </a:stretch>
               </a:blipFill>
             </p:spPr>
@@ -38315,7 +38570,7 @@
               <a:lstStyle/>
               <a:p>
                 <a:r>
-                  <a:rPr lang="vi-VN">
+                  <a:rPr lang="en-VN">
                     <a:noFill/>
                   </a:rPr>
                   <a:t> </a:t>
@@ -38325,8 +38580,8 @@
           </p:sp>
         </mc:Fallback>
       </mc:AlternateContent>
-      <mc:AlternateContent xmlns:mc="http://schemas.openxmlformats.org/markup-compatibility/2006" xmlns:a14="http://schemas.microsoft.com/office/drawing/2010/main">
-        <mc:Choice Requires="a14">
+      <mc:AlternateContent xmlns:mc="http://schemas.openxmlformats.org/markup-compatibility/2006">
+        <mc:Choice xmlns:a14="http://schemas.microsoft.com/office/drawing/2010/main" Requires="a14">
           <p:sp>
             <p:nvSpPr>
               <p:cNvPr id="8" name="Hộp Văn bản 7">
@@ -38362,13 +38617,10 @@
                 <a14:m>
                   <m:oMath xmlns:m="http://schemas.openxmlformats.org/officeDocument/2006/math">
                     <m:r>
-                      <m:rPr>
-                        <m:sty m:val="p"/>
-                      </m:rPr>
-                      <a:rPr lang="en-US" sz="2800" b="0" i="0" smtClean="0">
+                      <a:rPr lang="en-US" sz="2800" b="0" i="1" smtClean="0">
                         <a:latin typeface="Cambria Math" panose="02040503050406030204" pitchFamily="18" charset="0"/>
                       </a:rPr>
-                      <m:t>M</m:t>
+                      <m:t>𝑀</m:t>
                     </m:r>
                     <m:r>
                       <a:rPr lang="en-US" sz="2800" b="0" i="1" smtClean="0">
@@ -38685,7 +38937,7 @@
             </p:txBody>
           </p:sp>
         </mc:Choice>
-        <mc:Fallback xmlns="">
+        <mc:Fallback>
           <p:sp>
             <p:nvSpPr>
               <p:cNvPr id="8" name="Hộp Văn bản 7">
@@ -38711,7 +38963,7 @@
               <a:blipFill>
                 <a:blip r:embed="rId4"/>
                 <a:stretch>
-                  <a:fillRect l="-2679" t="-1125" r="-3571"/>
+                  <a:fillRect l="-25199" t="-1299" r="-3183" b="-37922"/>
                 </a:stretch>
               </a:blipFill>
             </p:spPr>
@@ -38720,7 +38972,7 @@
               <a:lstStyle/>
               <a:p>
                 <a:r>
-                  <a:rPr lang="vi-VN">
+                  <a:rPr lang="en-VN">
                     <a:noFill/>
                   </a:rPr>
                   <a:t> </a:t>
@@ -38730,8 +38982,8 @@
           </p:sp>
         </mc:Fallback>
       </mc:AlternateContent>
-      <mc:AlternateContent xmlns:mc="http://schemas.openxmlformats.org/markup-compatibility/2006" xmlns:a14="http://schemas.microsoft.com/office/drawing/2010/main">
-        <mc:Choice Requires="a14">
+      <mc:AlternateContent xmlns:mc="http://schemas.openxmlformats.org/markup-compatibility/2006">
+        <mc:Choice xmlns:a14="http://schemas.microsoft.com/office/drawing/2010/main" Requires="a14">
           <p:sp>
             <p:nvSpPr>
               <p:cNvPr id="10" name="Hộp Văn bản 9">
@@ -38746,8 +38998,8 @@
             </p:nvSpPr>
             <p:spPr>
               <a:xfrm>
-                <a:off x="5854503" y="5969655"/>
-                <a:ext cx="6337497" cy="523220"/>
+                <a:off x="5622235" y="5969655"/>
+                <a:ext cx="6811375" cy="552267"/>
               </a:xfrm>
               <a:prstGeom prst="rect">
                 <a:avLst/>
@@ -38762,47 +39014,58 @@
               <a:p>
                 <a:r>
                   <a:rPr lang="en-US" sz="2800"/>
-                  <a:t>State </a:t>
+                  <a:t>State</a:t>
                 </a:r>
                 <a14:m>
                   <m:oMath xmlns:m="http://schemas.openxmlformats.org/officeDocument/2006/math">
-                    <m:sSub>
-                      <m:sSubPr>
+                    <m:r>
+                      <a:rPr lang="vi-VN" sz="2800" b="0" i="0">
+                        <a:latin typeface="Cambria Math" panose="02040503050406030204" pitchFamily="18" charset="0"/>
+                      </a:rPr>
+                      <m:t> </m:t>
+                    </m:r>
+                    <m:sSup>
+                      <m:sSupPr>
                         <m:ctrlPr>
-                          <a:rPr lang="en-US" sz="2800" b="0" i="1" smtClean="0">
+                          <a:rPr lang="vi-VN" sz="2800" i="1">
                             <a:latin typeface="Cambria Math" panose="02040503050406030204" pitchFamily="18" charset="0"/>
                           </a:rPr>
                         </m:ctrlPr>
-                      </m:sSubPr>
+                      </m:sSupPr>
                       <m:e>
                         <m:r>
-                          <m:rPr>
-                            <m:sty m:val="p"/>
-                          </m:rPr>
-                          <a:rPr lang="en-US" sz="2800" b="0" i="0" smtClean="0">
+                          <a:rPr lang="vi-VN" sz="2800" i="1">
                             <a:latin typeface="Cambria Math" panose="02040503050406030204" pitchFamily="18" charset="0"/>
                           </a:rPr>
-                          <m:t>X</m:t>
+                          <m:t>𝑋</m:t>
                         </m:r>
                       </m:e>
-                      <m:sub>
-                        <m:r>
-                          <m:rPr>
-                            <m:sty m:val="p"/>
-                          </m:rPr>
-                          <a:rPr lang="en-US" sz="2800" b="0" i="0" smtClean="0">
-                            <a:latin typeface="Cambria Math" panose="02040503050406030204" pitchFamily="18" charset="0"/>
-                          </a:rPr>
-                          <m:t>t</m:t>
-                        </m:r>
-                        <m:r>
-                          <a:rPr lang="en-US" sz="2800" b="0" i="0" smtClean="0">
-                            <a:latin typeface="Cambria Math" panose="02040503050406030204" pitchFamily="18" charset="0"/>
-                          </a:rPr>
-                          <m:t>+1</m:t>
-                        </m:r>
-                      </m:sub>
-                    </m:sSub>
+                      <m:sup>
+                        <m:d>
+                          <m:dPr>
+                            <m:ctrlPr>
+                              <a:rPr lang="vi-VN" sz="2800" i="1">
+                                <a:latin typeface="Cambria Math" panose="02040503050406030204" pitchFamily="18" charset="0"/>
+                              </a:rPr>
+                            </m:ctrlPr>
+                          </m:dPr>
+                          <m:e>
+                            <m:r>
+                              <a:rPr lang="vi-VN" sz="2800" i="1">
+                                <a:latin typeface="Cambria Math" panose="02040503050406030204" pitchFamily="18" charset="0"/>
+                              </a:rPr>
+                              <m:t>𝑡</m:t>
+                            </m:r>
+                            <m:r>
+                              <a:rPr lang="vi-VN" sz="2800" b="0" i="1">
+                                <a:latin typeface="Cambria Math" panose="02040503050406030204" pitchFamily="18" charset="0"/>
+                              </a:rPr>
+                              <m:t>+1</m:t>
+                            </m:r>
+                          </m:e>
+                        </m:d>
+                      </m:sup>
+                    </m:sSup>
                     <m:r>
                       <a:rPr lang="en-US" sz="2800" b="0" i="1" smtClean="0">
                         <a:latin typeface="Cambria Math" panose="02040503050406030204" pitchFamily="18" charset="0"/>
@@ -38824,31 +39087,42 @@
                           </a:rPr>
                           <m:t>𝑀</m:t>
                         </m:r>
-                        <m:sSub>
-                          <m:sSubPr>
+                        <m:sSup>
+                          <m:sSupPr>
                             <m:ctrlPr>
-                              <a:rPr lang="en-US" sz="2800" b="0" i="1" smtClean="0">
+                              <a:rPr lang="vi-VN" sz="2800" i="1">
                                 <a:latin typeface="Cambria Math" panose="02040503050406030204" pitchFamily="18" charset="0"/>
                               </a:rPr>
                             </m:ctrlPr>
-                          </m:sSubPr>
+                          </m:sSupPr>
                           <m:e>
                             <m:r>
-                              <a:rPr lang="en-US" sz="2800" b="0" i="1" smtClean="0">
+                              <a:rPr lang="vi-VN" sz="2800" i="1">
                                 <a:latin typeface="Cambria Math" panose="02040503050406030204" pitchFamily="18" charset="0"/>
                               </a:rPr>
                               <m:t>𝑋</m:t>
                             </m:r>
                           </m:e>
-                          <m:sub>
-                            <m:r>
-                              <a:rPr lang="en-US" sz="2800" b="0" i="1" smtClean="0">
-                                <a:latin typeface="Cambria Math" panose="02040503050406030204" pitchFamily="18" charset="0"/>
-                              </a:rPr>
-                              <m:t>𝑡</m:t>
-                            </m:r>
-                          </m:sub>
-                        </m:sSub>
+                          <m:sup>
+                            <m:d>
+                              <m:dPr>
+                                <m:ctrlPr>
+                                  <a:rPr lang="vi-VN" sz="2800" i="1">
+                                    <a:latin typeface="Cambria Math" panose="02040503050406030204" pitchFamily="18" charset="0"/>
+                                  </a:rPr>
+                                </m:ctrlPr>
+                              </m:dPr>
+                              <m:e>
+                                <m:r>
+                                  <a:rPr lang="vi-VN" sz="2800" i="1">
+                                    <a:latin typeface="Cambria Math" panose="02040503050406030204" pitchFamily="18" charset="0"/>
+                                  </a:rPr>
+                                  <m:t>𝑡</m:t>
+                                </m:r>
+                              </m:e>
+                            </m:d>
+                          </m:sup>
+                        </m:sSup>
                         <m:r>
                           <m:rPr>
                             <m:nor/>
@@ -38856,7 +39130,7 @@
                           <a:rPr lang="en-US" sz="2800" b="0" i="0" smtClean="0">
                             <a:latin typeface="Cambria Math" panose="02040503050406030204" pitchFamily="18" charset="0"/>
                           </a:rPr>
-                          <m:t> = </m:t>
+                          <m:t>= </m:t>
                         </m:r>
                         <m:r>
                           <m:rPr>
@@ -38903,7 +39177,7 @@
             </p:txBody>
           </p:sp>
         </mc:Choice>
-        <mc:Fallback xmlns="">
+        <mc:Fallback>
           <p:sp>
             <p:nvSpPr>
               <p:cNvPr id="10" name="Hộp Văn bản 9">
@@ -38920,8 +39194,8 @@
             </p:nvSpPr>
             <p:spPr>
               <a:xfrm>
-                <a:off x="5854503" y="5969655"/>
-                <a:ext cx="6337497" cy="523220"/>
+                <a:off x="5622235" y="5969655"/>
+                <a:ext cx="6811375" cy="552267"/>
               </a:xfrm>
               <a:prstGeom prst="rect">
                 <a:avLst/>
@@ -38929,7 +39203,7 @@
               <a:blipFill>
                 <a:blip r:embed="rId5"/>
                 <a:stretch>
-                  <a:fillRect l="-1923" t="-10465" b="-32558"/>
+                  <a:fillRect l="-1859" t="-2222" b="-31111"/>
                 </a:stretch>
               </a:blipFill>
             </p:spPr>
@@ -38938,7 +39212,7 @@
               <a:lstStyle/>
               <a:p>
                 <a:r>
-                  <a:rPr lang="vi-VN">
+                  <a:rPr lang="en-VN">
                     <a:noFill/>
                   </a:rPr>
                   <a:t> </a:t>
@@ -39179,14 +39453,14 @@
           <a:p>
             <a:r>
               <a:rPr lang="en-US"/>
-              <a:t>2. Markov</a:t>
+              <a:t>2. Single marble</a:t>
             </a:r>
             <a:endParaRPr lang="en-US" dirty="0"/>
           </a:p>
         </p:txBody>
       </p:sp>
-      <mc:AlternateContent xmlns:mc="http://schemas.openxmlformats.org/markup-compatibility/2006" xmlns:a14="http://schemas.microsoft.com/office/drawing/2010/main">
-        <mc:Choice Requires="a14">
+      <mc:AlternateContent xmlns:mc="http://schemas.openxmlformats.org/markup-compatibility/2006">
+        <mc:Choice xmlns:a14="http://schemas.microsoft.com/office/drawing/2010/main" Requires="a14">
           <p:sp>
             <p:nvSpPr>
               <p:cNvPr id="5" name="Hộp Văn bản 4">
@@ -39274,10 +39548,11 @@
                       </m:e>
                       <m:sup>
                         <m:r>
-                          <a:rPr lang="en-US" sz="2800" b="0" i="1" smtClean="0">
+                          <a:rPr lang="en-US" sz="2800" i="1">
                             <a:latin typeface="Cambria Math" panose="02040503050406030204" pitchFamily="18" charset="0"/>
+                            <a:ea typeface="Cambria Math" panose="02040503050406030204" pitchFamily="18" charset="0"/>
                           </a:rPr>
-                          <m:t>𝑇</m:t>
+                          <m:t>⊺</m:t>
                         </m:r>
                       </m:sup>
                     </m:sSup>
@@ -39288,7 +39563,7 @@
             </p:txBody>
           </p:sp>
         </mc:Choice>
-        <mc:Fallback xmlns="">
+        <mc:Fallback>
           <p:sp>
             <p:nvSpPr>
               <p:cNvPr id="5" name="Hộp Văn bản 4">
@@ -39314,7 +39589,7 @@
               <a:blipFill>
                 <a:blip r:embed="rId3"/>
                 <a:stretch>
-                  <a:fillRect l="-2021" t="-10465" b="-32558"/>
+                  <a:fillRect l="-2004" t="-11905" b="-30952"/>
                 </a:stretch>
               </a:blipFill>
             </p:spPr>
@@ -39323,7 +39598,7 @@
               <a:lstStyle/>
               <a:p>
                 <a:r>
-                  <a:rPr lang="vi-VN">
+                  <a:rPr lang="en-VN">
                     <a:noFill/>
                   </a:rPr>
                   <a:t> </a:t>
@@ -39333,8 +39608,8 @@
           </p:sp>
         </mc:Fallback>
       </mc:AlternateContent>
-      <mc:AlternateContent xmlns:mc="http://schemas.openxmlformats.org/markup-compatibility/2006" xmlns:a14="http://schemas.microsoft.com/office/drawing/2010/main">
-        <mc:Choice Requires="a14">
+      <mc:AlternateContent xmlns:mc="http://schemas.openxmlformats.org/markup-compatibility/2006">
+        <mc:Choice xmlns:a14="http://schemas.microsoft.com/office/drawing/2010/main" Requires="a14">
           <p:sp>
             <p:nvSpPr>
               <p:cNvPr id="8" name="Hộp Văn bản 7">
@@ -39350,7 +39625,7 @@
             <p:spPr>
               <a:xfrm>
                 <a:off x="838200" y="1825625"/>
-                <a:ext cx="4178105" cy="1892698"/>
+                <a:ext cx="4178105" cy="1783630"/>
               </a:xfrm>
               <a:prstGeom prst="rect">
                 <a:avLst/>
@@ -39379,21 +39654,19 @@
                       </m:sSupPr>
                       <m:e>
                         <m:r>
-                          <m:rPr>
-                            <m:sty m:val="p"/>
-                          </m:rPr>
-                          <a:rPr lang="en-US" sz="2800" smtClean="0">
+                          <a:rPr lang="en-US" sz="2800" i="1" smtClean="0">
                             <a:latin typeface="Cambria Math" panose="02040503050406030204" pitchFamily="18" charset="0"/>
                           </a:rPr>
-                          <m:t>M</m:t>
+                          <m:t>𝑀</m:t>
                         </m:r>
                       </m:e>
                       <m:sup>
                         <m:r>
-                          <a:rPr lang="en-US" sz="2800" b="0" i="1" smtClean="0">
+                          <a:rPr lang="en-US" sz="2800" i="1" smtClean="0">
                             <a:latin typeface="Cambria Math" panose="02040503050406030204" pitchFamily="18" charset="0"/>
+                            <a:ea typeface="Cambria Math" panose="02040503050406030204" pitchFamily="18" charset="0"/>
                           </a:rPr>
-                          <m:t>𝑇</m:t>
+                          <m:t>⊺</m:t>
                         </m:r>
                       </m:sup>
                     </m:sSup>
@@ -39569,7 +39842,7 @@
             </p:txBody>
           </p:sp>
         </mc:Choice>
-        <mc:Fallback xmlns="">
+        <mc:Fallback>
           <p:sp>
             <p:nvSpPr>
               <p:cNvPr id="8" name="Hộp Văn bản 7">
@@ -39587,7 +39860,7 @@
             <p:spPr>
               <a:xfrm>
                 <a:off x="838200" y="1825625"/>
-                <a:ext cx="4178105" cy="1892698"/>
+                <a:ext cx="4178105" cy="1783630"/>
               </a:xfrm>
               <a:prstGeom prst="rect">
                 <a:avLst/>
@@ -39595,7 +39868,7 @@
               <a:blipFill>
                 <a:blip r:embed="rId4"/>
                 <a:stretch>
-                  <a:fillRect l="-3066" t="-2894"/>
+                  <a:fillRect l="-3030" t="-3521" b="-5634"/>
                 </a:stretch>
               </a:blipFill>
             </p:spPr>
@@ -39604,7 +39877,7 @@
               <a:lstStyle/>
               <a:p>
                 <a:r>
-                  <a:rPr lang="vi-VN">
+                  <a:rPr lang="en-VN">
                     <a:noFill/>
                   </a:rPr>
                   <a:t> </a:t>
@@ -39614,8 +39887,8 @@
           </p:sp>
         </mc:Fallback>
       </mc:AlternateContent>
-      <mc:AlternateContent xmlns:mc="http://schemas.openxmlformats.org/markup-compatibility/2006" xmlns:a14="http://schemas.microsoft.com/office/drawing/2010/main">
-        <mc:Choice Requires="a14">
+      <mc:AlternateContent xmlns:mc="http://schemas.openxmlformats.org/markup-compatibility/2006">
+        <mc:Choice xmlns:a14="http://schemas.microsoft.com/office/drawing/2010/main" Requires="a14">
           <p:sp>
             <p:nvSpPr>
               <p:cNvPr id="10" name="Hộp Văn bản 9">
@@ -39631,7 +39904,7 @@
             <p:spPr>
               <a:xfrm>
                 <a:off x="838200" y="4447302"/>
-                <a:ext cx="6516759" cy="954107"/>
+                <a:ext cx="6516759" cy="990977"/>
               </a:xfrm>
               <a:prstGeom prst="rect">
                 <a:avLst/>
@@ -39708,10 +39981,11 @@
                         </m:e>
                         <m:sup>
                           <m:r>
-                            <a:rPr lang="en-US" sz="2800" b="0" i="1" smtClean="0">
+                            <a:rPr lang="en-US" sz="2800" i="1">
                               <a:latin typeface="Cambria Math" panose="02040503050406030204" pitchFamily="18" charset="0"/>
+                              <a:ea typeface="Cambria Math" panose="02040503050406030204" pitchFamily="18" charset="0"/>
                             </a:rPr>
-                            <m:t>𝑇</m:t>
+                            <m:t>⊺</m:t>
                           </m:r>
                         </m:sup>
                       </m:sSup>
@@ -39741,10 +40015,11 @@
                       </m:e>
                       <m:sup>
                         <m:r>
-                          <a:rPr lang="en-US" sz="2800" b="0" i="1" smtClean="0">
+                          <a:rPr lang="en-US" sz="2800" i="1">
                             <a:latin typeface="Cambria Math" panose="02040503050406030204" pitchFamily="18" charset="0"/>
+                            <a:ea typeface="Cambria Math" panose="02040503050406030204" pitchFamily="18" charset="0"/>
                           </a:rPr>
-                          <m:t>𝑇</m:t>
+                          <m:t>⊺</m:t>
                         </m:r>
                       </m:sup>
                     </m:sSup>
@@ -39784,7 +40059,7 @@
             </p:txBody>
           </p:sp>
         </mc:Choice>
-        <mc:Fallback xmlns="">
+        <mc:Fallback>
           <p:sp>
             <p:nvSpPr>
               <p:cNvPr id="10" name="Hộp Văn bản 9">
@@ -39802,7 +40077,7 @@
             <p:spPr>
               <a:xfrm>
                 <a:off x="838200" y="4447302"/>
-                <a:ext cx="6516759" cy="954107"/>
+                <a:ext cx="6516759" cy="990977"/>
               </a:xfrm>
               <a:prstGeom prst="rect">
                 <a:avLst/>
@@ -39810,7 +40085,7 @@
               <a:blipFill>
                 <a:blip r:embed="rId5"/>
                 <a:stretch>
-                  <a:fillRect b="-17949"/>
+                  <a:fillRect l="-584" t="-5063" b="-12658"/>
                 </a:stretch>
               </a:blipFill>
             </p:spPr>
@@ -39819,7 +40094,7 @@
               <a:lstStyle/>
               <a:p>
                 <a:r>
-                  <a:rPr lang="vi-VN">
+                  <a:rPr lang="en-VN">
                     <a:noFill/>
                   </a:rPr>
                   <a:t> </a:t>
@@ -39829,8 +40104,8 @@
           </p:sp>
         </mc:Fallback>
       </mc:AlternateContent>
-      <mc:AlternateContent xmlns:mc="http://schemas.openxmlformats.org/markup-compatibility/2006" xmlns:a14="http://schemas.microsoft.com/office/drawing/2010/main">
-        <mc:Choice Requires="a14">
+      <mc:AlternateContent xmlns:mc="http://schemas.openxmlformats.org/markup-compatibility/2006">
+        <mc:Choice xmlns:a14="http://schemas.microsoft.com/office/drawing/2010/main" Requires="a14">
           <p:sp>
             <p:nvSpPr>
               <p:cNvPr id="14" name="Hộp Văn bản 13">
@@ -39884,10 +40159,11 @@
                         </m:e>
                         <m:sup>
                           <m:r>
-                            <a:rPr lang="en-US" sz="3600" b="0" i="1" smtClean="0">
+                            <a:rPr lang="en-US" sz="3600" i="1">
                               <a:latin typeface="Cambria Math" panose="02040503050406030204" pitchFamily="18" charset="0"/>
+                              <a:ea typeface="Cambria Math" panose="02040503050406030204" pitchFamily="18" charset="0"/>
                             </a:rPr>
-                            <m:t>𝑇</m:t>
+                            <m:t>⊺</m:t>
                           </m:r>
                         </m:sup>
                       </m:sSup>
@@ -39899,7 +40175,7 @@
             </p:txBody>
           </p:sp>
         </mc:Choice>
-        <mc:Fallback xmlns="">
+        <mc:Fallback>
           <p:sp>
             <p:nvSpPr>
               <p:cNvPr id="14" name="Hộp Văn bản 13">
@@ -39934,7 +40210,7 @@
               <a:lstStyle/>
               <a:p>
                 <a:r>
-                  <a:rPr lang="vi-VN">
+                  <a:rPr lang="en-VN">
                     <a:noFill/>
                   </a:rPr>
                   <a:t> </a:t>
@@ -39973,8 +40249,8 @@
           </a:p>
         </p:txBody>
       </p:sp>
-      <mc:AlternateContent xmlns:mc="http://schemas.openxmlformats.org/markup-compatibility/2006" xmlns:a14="http://schemas.microsoft.com/office/drawing/2010/main">
-        <mc:Choice Requires="a14">
+      <mc:AlternateContent xmlns:mc="http://schemas.openxmlformats.org/markup-compatibility/2006">
+        <mc:Choice xmlns:a14="http://schemas.microsoft.com/office/drawing/2010/main" Requires="a14">
           <p:sp>
             <p:nvSpPr>
               <p:cNvPr id="18" name="Hộp Văn bản 17">
@@ -39990,7 +40266,7 @@
             <p:spPr>
               <a:xfrm>
                 <a:off x="838200" y="5463397"/>
-                <a:ext cx="6467060" cy="954107"/>
+                <a:ext cx="6467060" cy="990977"/>
               </a:xfrm>
               <a:prstGeom prst="rect">
                 <a:avLst/>
@@ -40028,10 +40304,11 @@
                         </m:e>
                         <m:sup>
                           <m:r>
-                            <a:rPr lang="en-US" sz="2800" b="0" i="1" smtClean="0">
+                            <a:rPr lang="en-US" sz="2800" i="1">
                               <a:latin typeface="Cambria Math" panose="02040503050406030204" pitchFamily="18" charset="0"/>
+                              <a:ea typeface="Cambria Math" panose="02040503050406030204" pitchFamily="18" charset="0"/>
                             </a:rPr>
-                            <m:t>𝑇</m:t>
+                            <m:t>⊺</m:t>
                           </m:r>
                         </m:sup>
                       </m:sSup>
@@ -40053,10 +40330,11 @@
                         </m:e>
                         <m:sup>
                           <m:r>
-                            <a:rPr lang="en-US" sz="2800" b="0" i="1" smtClean="0">
+                            <a:rPr lang="en-US" sz="2800" i="1">
                               <a:latin typeface="Cambria Math" panose="02040503050406030204" pitchFamily="18" charset="0"/>
+                              <a:ea typeface="Cambria Math" panose="02040503050406030204" pitchFamily="18" charset="0"/>
                             </a:rPr>
-                            <m:t>𝑇</m:t>
+                            <m:t>⊺</m:t>
                           </m:r>
                         </m:sup>
                       </m:sSup>
@@ -40095,10 +40373,11 @@
                         </m:e>
                         <m:sup>
                           <m:r>
-                            <a:rPr lang="en-US" sz="2800" b="0" i="1" smtClean="0">
+                            <a:rPr lang="en-US" sz="2800" i="1">
                               <a:latin typeface="Cambria Math" panose="02040503050406030204" pitchFamily="18" charset="0"/>
+                              <a:ea typeface="Cambria Math" panose="02040503050406030204" pitchFamily="18" charset="0"/>
                             </a:rPr>
-                            <m:t>𝑇</m:t>
+                            <m:t>⊺</m:t>
                           </m:r>
                         </m:sup>
                       </m:sSup>
@@ -40126,10 +40405,11 @@
                         </m:e>
                         <m:sup>
                           <m:r>
-                            <a:rPr lang="en-US" sz="2800" b="0" i="1" smtClean="0">
+                            <a:rPr lang="en-US" sz="2800" i="1">
                               <a:latin typeface="Cambria Math" panose="02040503050406030204" pitchFamily="18" charset="0"/>
+                              <a:ea typeface="Cambria Math" panose="02040503050406030204" pitchFamily="18" charset="0"/>
                             </a:rPr>
-                            <m:t>𝑇</m:t>
+                            <m:t>⊺</m:t>
                           </m:r>
                         </m:sup>
                       </m:sSup>
@@ -40157,7 +40437,7 @@
             </p:txBody>
           </p:sp>
         </mc:Choice>
-        <mc:Fallback xmlns="">
+        <mc:Fallback>
           <p:sp>
             <p:nvSpPr>
               <p:cNvPr id="18" name="Hộp Văn bản 17">
@@ -40175,7 +40455,7 @@
             <p:spPr>
               <a:xfrm>
                 <a:off x="838200" y="5463397"/>
-                <a:ext cx="6467060" cy="954107"/>
+                <a:ext cx="6467060" cy="990977"/>
               </a:xfrm>
               <a:prstGeom prst="rect">
                 <a:avLst/>
@@ -40183,7 +40463,7 @@
               <a:blipFill>
                 <a:blip r:embed="rId7"/>
                 <a:stretch>
-                  <a:fillRect b="-17197"/>
+                  <a:fillRect l="-588" b="-11392"/>
                 </a:stretch>
               </a:blipFill>
             </p:spPr>
@@ -40192,7 +40472,7 @@
               <a:lstStyle/>
               <a:p>
                 <a:r>
-                  <a:rPr lang="vi-VN">
+                  <a:rPr lang="en-VN">
                     <a:noFill/>
                   </a:rPr>
                   <a:t> </a:t>
@@ -40259,7 +40539,7 @@
             </a:r>
             <a:r>
               <a:rPr lang="en-US" dirty="0"/>
-              <a:t>. Dynamic</a:t>
+              <a:t>. Single marble</a:t>
             </a:r>
           </a:p>
         </p:txBody>
@@ -40769,13 +41049,13 @@
             </a:r>
             <a:r>
               <a:rPr lang="en-US" dirty="0"/>
-              <a:t>Quantum</a:t>
+              <a:t>Quantum marble</a:t>
             </a:r>
           </a:p>
         </p:txBody>
       </p:sp>
-      <mc:AlternateContent xmlns:mc="http://schemas.openxmlformats.org/markup-compatibility/2006" xmlns:a14="http://schemas.microsoft.com/office/drawing/2010/main">
-        <mc:Choice Requires="a14">
+      <mc:AlternateContent xmlns:mc="http://schemas.openxmlformats.org/markup-compatibility/2006">
+        <mc:Choice xmlns:a14="http://schemas.microsoft.com/office/drawing/2010/main" Requires="a14">
           <p:sp>
             <p:nvSpPr>
               <p:cNvPr id="5" name="Hộp Văn bản 4">
@@ -40810,31 +41090,42 @@
                 </a:r>
                 <a14:m>
                   <m:oMath xmlns:m="http://schemas.openxmlformats.org/officeDocument/2006/math">
-                    <m:sSub>
-                      <m:sSubPr>
+                    <m:sSup>
+                      <m:sSupPr>
                         <m:ctrlPr>
-                          <a:rPr lang="en-US" sz="2800" b="0" i="1" smtClean="0">
+                          <a:rPr lang="vi-VN" sz="2800" b="0" i="1">
                             <a:latin typeface="Cambria Math" panose="02040503050406030204" pitchFamily="18" charset="0"/>
                           </a:rPr>
                         </m:ctrlPr>
-                      </m:sSubPr>
+                      </m:sSupPr>
                       <m:e>
                         <m:r>
-                          <a:rPr lang="en-US" sz="2800" b="0" i="1" smtClean="0">
+                          <a:rPr lang="en-US" sz="2800" b="0" i="1">
                             <a:latin typeface="Cambria Math" panose="02040503050406030204" pitchFamily="18" charset="0"/>
                           </a:rPr>
                           <m:t>𝑋</m:t>
                         </m:r>
                       </m:e>
-                      <m:sub>
-                        <m:r>
-                          <a:rPr lang="en-US" sz="2800" b="0" i="1" smtClean="0">
-                            <a:latin typeface="Cambria Math" panose="02040503050406030204" pitchFamily="18" charset="0"/>
-                          </a:rPr>
-                          <m:t>𝑡</m:t>
-                        </m:r>
-                      </m:sub>
-                    </m:sSub>
+                      <m:sup>
+                        <m:d>
+                          <m:dPr>
+                            <m:ctrlPr>
+                              <a:rPr lang="vi-VN" sz="2800" b="0" i="1">
+                                <a:latin typeface="Cambria Math" panose="02040503050406030204" pitchFamily="18" charset="0"/>
+                              </a:rPr>
+                            </m:ctrlPr>
+                          </m:dPr>
+                          <m:e>
+                            <m:r>
+                              <a:rPr lang="vi-VN" sz="2800" i="1">
+                                <a:latin typeface="Cambria Math" panose="02040503050406030204" pitchFamily="18" charset="0"/>
+                              </a:rPr>
+                              <m:t>𝑡</m:t>
+                            </m:r>
+                          </m:e>
+                        </m:d>
+                      </m:sup>
+                    </m:sSup>
                     <m:r>
                       <a:rPr lang="en-US" sz="2800" b="0" i="1" smtClean="0">
                         <a:latin typeface="Cambria Math" panose="02040503050406030204" pitchFamily="18" charset="0"/>
@@ -41005,10 +41296,11 @@
                       </m:e>
                       <m:sup>
                         <m:r>
-                          <a:rPr lang="en-US" sz="2800" b="0" i="1" smtClean="0">
+                          <a:rPr lang="en-US" sz="2800" i="1">
                             <a:latin typeface="Cambria Math" panose="02040503050406030204" pitchFamily="18" charset="0"/>
+                            <a:ea typeface="Cambria Math" panose="02040503050406030204" pitchFamily="18" charset="0"/>
                           </a:rPr>
-                          <m:t>𝑇</m:t>
+                          <m:t>⊺</m:t>
                         </m:r>
                       </m:sup>
                     </m:sSup>
@@ -41019,7 +41311,7 @@
             </p:txBody>
           </p:sp>
         </mc:Choice>
-        <mc:Fallback xmlns="">
+        <mc:Fallback>
           <p:sp>
             <p:nvSpPr>
               <p:cNvPr id="5" name="Hộp Văn bản 4">
@@ -41045,7 +41337,7 @@
               <a:blipFill>
                 <a:blip r:embed="rId3"/>
                 <a:stretch>
-                  <a:fillRect l="-1923"/>
+                  <a:fillRect l="-1800"/>
                 </a:stretch>
               </a:blipFill>
             </p:spPr>
@@ -41054,7 +41346,7 @@
               <a:lstStyle/>
               <a:p>
                 <a:r>
-                  <a:rPr lang="vi-VN">
+                  <a:rPr lang="en-VN">
                     <a:noFill/>
                   </a:rPr>
                   <a:t> </a:t>
@@ -41064,8 +41356,8 @@
           </p:sp>
         </mc:Fallback>
       </mc:AlternateContent>
-      <mc:AlternateContent xmlns:mc="http://schemas.openxmlformats.org/markup-compatibility/2006" xmlns:a14="http://schemas.microsoft.com/office/drawing/2010/main">
-        <mc:Choice Requires="a14">
+      <mc:AlternateContent xmlns:mc="http://schemas.openxmlformats.org/markup-compatibility/2006">
+        <mc:Choice xmlns:a14="http://schemas.microsoft.com/office/drawing/2010/main" Requires="a14">
           <p:sp>
             <p:nvSpPr>
               <p:cNvPr id="8" name="Hộp Văn bản 7">
@@ -41081,7 +41373,7 @@
             <p:spPr>
               <a:xfrm>
                 <a:off x="838200" y="1825625"/>
-                <a:ext cx="4178105" cy="2267095"/>
+                <a:ext cx="6042102" cy="1799019"/>
               </a:xfrm>
               <a:prstGeom prst="rect">
                 <a:avLst/>
@@ -41101,13 +41393,10 @@
                 <a14:m>
                   <m:oMath xmlns:m="http://schemas.openxmlformats.org/officeDocument/2006/math">
                     <m:r>
-                      <m:rPr>
-                        <m:sty m:val="p"/>
-                      </m:rPr>
-                      <a:rPr lang="en-US" sz="2800" b="0" i="0" smtClean="0">
+                      <a:rPr lang="en-US" sz="2800" b="0" i="1" smtClean="0">
                         <a:latin typeface="Cambria Math" panose="02040503050406030204" pitchFamily="18" charset="0"/>
                       </a:rPr>
-                      <m:t>U</m:t>
+                      <m:t>𝑈</m:t>
                     </m:r>
                     <m:r>
                       <a:rPr lang="en-US" sz="2800" b="0" i="1" smtClean="0">
@@ -41370,7 +41659,7 @@
             </p:txBody>
           </p:sp>
         </mc:Choice>
-        <mc:Fallback xmlns="">
+        <mc:Fallback>
           <p:sp>
             <p:nvSpPr>
               <p:cNvPr id="8" name="Hộp Văn bản 7">
@@ -41388,7 +41677,7 @@
             <p:spPr>
               <a:xfrm>
                 <a:off x="838200" y="1825625"/>
-                <a:ext cx="4178105" cy="2267095"/>
+                <a:ext cx="6042102" cy="1799019"/>
               </a:xfrm>
               <a:prstGeom prst="rect">
                 <a:avLst/>
@@ -41396,7 +41685,7 @@
               <a:blipFill>
                 <a:blip r:embed="rId4"/>
                 <a:stretch>
-                  <a:fillRect l="-3066" t="-2419"/>
+                  <a:fillRect l="-2101" b="-3497"/>
                 </a:stretch>
               </a:blipFill>
             </p:spPr>
@@ -41405,7 +41694,7 @@
               <a:lstStyle/>
               <a:p>
                 <a:r>
-                  <a:rPr lang="vi-VN">
+                  <a:rPr lang="en-VN">
                     <a:noFill/>
                   </a:rPr>
                   <a:t> </a:t>
@@ -41415,8 +41704,8 @@
           </p:sp>
         </mc:Fallback>
       </mc:AlternateContent>
-      <mc:AlternateContent xmlns:mc="http://schemas.openxmlformats.org/markup-compatibility/2006" xmlns:a14="http://schemas.microsoft.com/office/drawing/2010/main">
-        <mc:Choice Requires="a14">
+      <mc:AlternateContent xmlns:mc="http://schemas.openxmlformats.org/markup-compatibility/2006">
+        <mc:Choice xmlns:a14="http://schemas.microsoft.com/office/drawing/2010/main" Requires="a14">
           <p:sp>
             <p:nvSpPr>
               <p:cNvPr id="10" name="Hộp Văn bản 9">
@@ -41432,7 +41721,7 @@
             <p:spPr>
               <a:xfrm>
                 <a:off x="838198" y="5689411"/>
-                <a:ext cx="6337497" cy="969176"/>
+                <a:ext cx="7772402" cy="969176"/>
               </a:xfrm>
               <a:prstGeom prst="rect">
                 <a:avLst/>
@@ -41451,43 +41740,48 @@
                 </a:r>
                 <a14:m>
                   <m:oMath xmlns:m="http://schemas.openxmlformats.org/officeDocument/2006/math">
-                    <m:sSub>
-                      <m:sSubPr>
+                    <m:sSup>
+                      <m:sSupPr>
                         <m:ctrlPr>
-                          <a:rPr lang="en-US" sz="2800" b="0" i="1" smtClean="0">
+                          <a:rPr lang="vi-VN" sz="2800" b="0" i="1">
                             <a:latin typeface="Cambria Math" panose="02040503050406030204" pitchFamily="18" charset="0"/>
                           </a:rPr>
                         </m:ctrlPr>
-                      </m:sSubPr>
+                      </m:sSupPr>
                       <m:e>
                         <m:r>
-                          <m:rPr>
-                            <m:sty m:val="p"/>
-                          </m:rPr>
-                          <a:rPr lang="en-US" sz="2800" b="0" i="0" smtClean="0">
+                          <a:rPr lang="en-VN" sz="2800" b="0" i="1">
                             <a:latin typeface="Cambria Math" panose="02040503050406030204" pitchFamily="18" charset="0"/>
                           </a:rPr>
-                          <m:t>X</m:t>
+                          <m:t>𝑋</m:t>
                         </m:r>
                       </m:e>
-                      <m:sub>
-                        <m:r>
-                          <m:rPr>
-                            <m:sty m:val="p"/>
-                          </m:rPr>
-                          <a:rPr lang="en-US" sz="2800" b="0" i="0" smtClean="0">
-                            <a:latin typeface="Cambria Math" panose="02040503050406030204" pitchFamily="18" charset="0"/>
-                          </a:rPr>
-                          <m:t>t</m:t>
-                        </m:r>
-                        <m:r>
-                          <a:rPr lang="en-US" sz="2800" b="0" i="0" smtClean="0">
-                            <a:latin typeface="Cambria Math" panose="02040503050406030204" pitchFamily="18" charset="0"/>
-                          </a:rPr>
-                          <m:t>+1</m:t>
-                        </m:r>
-                      </m:sub>
-                    </m:sSub>
+                      <m:sup>
+                        <m:d>
+                          <m:dPr>
+                            <m:ctrlPr>
+                              <a:rPr lang="vi-VN" sz="2800" b="0" i="1">
+                                <a:latin typeface="Cambria Math" panose="02040503050406030204" pitchFamily="18" charset="0"/>
+                              </a:rPr>
+                            </m:ctrlPr>
+                          </m:dPr>
+                          <m:e>
+                            <m:r>
+                              <a:rPr lang="vi-VN" sz="2800" i="1">
+                                <a:latin typeface="Cambria Math" panose="02040503050406030204" pitchFamily="18" charset="0"/>
+                              </a:rPr>
+                              <m:t>𝑡</m:t>
+                            </m:r>
+                            <m:r>
+                              <a:rPr lang="vi-VN" sz="2800" b="0" i="1">
+                                <a:latin typeface="Cambria Math" panose="02040503050406030204" pitchFamily="18" charset="0"/>
+                              </a:rPr>
+                              <m:t>+1</m:t>
+                            </m:r>
+                          </m:e>
+                        </m:d>
+                      </m:sup>
+                    </m:sSup>
                     <m:r>
                       <a:rPr lang="en-US" sz="2800" b="0" i="1" smtClean="0">
                         <a:latin typeface="Cambria Math" panose="02040503050406030204" pitchFamily="18" charset="0"/>
@@ -41509,36 +41803,47 @@
                           </a:rPr>
                           <m:t>𝑀</m:t>
                         </m:r>
-                        <m:sSub>
-                          <m:sSubPr>
+                        <m:sSup>
+                          <m:sSupPr>
                             <m:ctrlPr>
-                              <a:rPr lang="en-US" sz="2800" b="0" i="1" smtClean="0">
+                              <a:rPr lang="vi-VN" sz="2800" b="0" i="1" smtClean="0">
                                 <a:latin typeface="Cambria Math" panose="02040503050406030204" pitchFamily="18" charset="0"/>
                               </a:rPr>
                             </m:ctrlPr>
-                          </m:sSubPr>
+                          </m:sSupPr>
                           <m:e>
                             <m:r>
-                              <a:rPr lang="en-US" sz="2800" b="0" i="1" smtClean="0">
+                              <a:rPr lang="en-US" sz="2800" i="1">
                                 <a:latin typeface="Cambria Math" panose="02040503050406030204" pitchFamily="18" charset="0"/>
                               </a:rPr>
                               <m:t>𝑋</m:t>
                             </m:r>
                           </m:e>
-                          <m:sub>
-                            <m:r>
-                              <a:rPr lang="en-US" sz="2800" b="0" i="1" smtClean="0">
-                                <a:latin typeface="Cambria Math" panose="02040503050406030204" pitchFamily="18" charset="0"/>
-                              </a:rPr>
-                              <m:t>𝑡</m:t>
-                            </m:r>
-                          </m:sub>
-                        </m:sSub>
+                          <m:sup>
+                            <m:d>
+                              <m:dPr>
+                                <m:ctrlPr>
+                                  <a:rPr lang="vi-VN" sz="2800" b="0" i="1">
+                                    <a:latin typeface="Cambria Math" panose="02040503050406030204" pitchFamily="18" charset="0"/>
+                                  </a:rPr>
+                                </m:ctrlPr>
+                              </m:dPr>
+                              <m:e>
+                                <m:r>
+                                  <a:rPr lang="vi-VN" sz="2800" i="1">
+                                    <a:latin typeface="Cambria Math" panose="02040503050406030204" pitchFamily="18" charset="0"/>
+                                  </a:rPr>
+                                  <m:t>𝑡</m:t>
+                                </m:r>
+                              </m:e>
+                            </m:d>
+                          </m:sup>
+                        </m:sSup>
                         <m:r>
                           <m:rPr>
                             <m:nor/>
                           </m:rPr>
-                          <a:rPr lang="en-US" sz="2800" b="0" i="0" smtClean="0">
+                          <a:rPr lang="en-US" sz="2800" b="0" i="1" smtClean="0">
                             <a:latin typeface="Cambria Math" panose="02040503050406030204" pitchFamily="18" charset="0"/>
                           </a:rPr>
                           <m:t> = </m:t>
@@ -41667,7 +41972,7 @@
                           <m:rPr>
                             <m:nor/>
                           </m:rPr>
-                          <a:rPr lang="en-US" sz="2800" b="0" i="0" smtClean="0">
+                          <a:rPr lang="en-US" sz="2800" b="0" i="1" smtClean="0">
                             <a:latin typeface="Cambria Math" panose="02040503050406030204" pitchFamily="18" charset="0"/>
                           </a:rPr>
                           <m:t>,</m:t>
@@ -41726,21 +42031,22 @@
                       </m:e>
                       <m:sup>
                         <m:r>
-                          <a:rPr lang="en-US" sz="2800" b="0" i="1" smtClean="0">
+                          <a:rPr lang="en-US" sz="2800" i="1">
                             <a:latin typeface="Cambria Math" panose="02040503050406030204" pitchFamily="18" charset="0"/>
+                            <a:ea typeface="Cambria Math" panose="02040503050406030204" pitchFamily="18" charset="0"/>
                           </a:rPr>
-                          <m:t>𝑇</m:t>
+                          <m:t>⊺</m:t>
                         </m:r>
                       </m:sup>
                     </m:sSup>
                   </m:oMath>
                 </a14:m>
-                <a:endParaRPr lang="en-US" sz="2800"/>
+                <a:endParaRPr lang="en-US" sz="2800" i="1"/>
               </a:p>
             </p:txBody>
           </p:sp>
         </mc:Choice>
-        <mc:Fallback xmlns="">
+        <mc:Fallback>
           <p:sp>
             <p:nvSpPr>
               <p:cNvPr id="10" name="Hộp Văn bản 9">
@@ -41758,7 +42064,7 @@
             <p:spPr>
               <a:xfrm>
                 <a:off x="838198" y="5689411"/>
-                <a:ext cx="6337497" cy="969176"/>
+                <a:ext cx="7772402" cy="969176"/>
               </a:xfrm>
               <a:prstGeom prst="rect">
                 <a:avLst/>
@@ -41766,7 +42072,7 @@
               <a:blipFill>
                 <a:blip r:embed="rId5"/>
                 <a:stretch>
-                  <a:fillRect l="-1923"/>
+                  <a:fillRect l="-1466"/>
                 </a:stretch>
               </a:blipFill>
             </p:spPr>
@@ -41775,7 +42081,7 @@
               <a:lstStyle/>
               <a:p>
                 <a:r>
-                  <a:rPr lang="en-US">
+                  <a:rPr lang="en-VN">
                     <a:noFill/>
                   </a:rPr>
                   <a:t> </a:t>
@@ -42143,7 +42449,7 @@
             <a:pPr algn="ctr"/>
             <a:r>
               <a:rPr lang="en-US"/>
-              <a:t>Quantum Turing machine</a:t>
+              <a:t>Turing machines</a:t>
             </a:r>
             <a:endParaRPr lang="vi-VN"/>
           </a:p>
